--- a/livro_ia_educacao/saida/pptx/Cap14_slides.pptx
+++ b/livro_ia_educacao/saida/pptx/Cap14_slides.pptx
@@ -9869,11 +9869,11 @@
         <p:spPr>
           <a:xfrm>
             <a:off x="548640" y="1417320"/>
-            <a:ext cx="11064240" cy="762000"/>
+            <a:ext cx="11064240" cy="682752"/>
           </a:xfrm>
           <a:prstGeom prst="roundRect">
             <a:avLst>
-              <a:gd name="adj" fmla="val 14400"/>
+              <a:gd name="adj" fmla="val 16071"/>
             </a:avLst>
           </a:prstGeom>
           <a:solidFill>
@@ -9900,7 +9900,7 @@
         <p:spPr>
           <a:xfrm>
             <a:off x="731520" y="1417320"/>
-            <a:ext cx="548640" cy="762000"/>
+            <a:ext cx="548640" cy="682752"/>
           </a:xfrm>
           <a:prstGeom prst="rect">
             <a:avLst/>
@@ -9936,7 +9936,7 @@
         <p:spPr>
           <a:xfrm>
             <a:off x="1463040" y="1417320"/>
-            <a:ext cx="9966960" cy="762000"/>
+            <a:ext cx="9966960" cy="682752"/>
           </a:xfrm>
           <a:prstGeom prst="rect">
             <a:avLst/>
@@ -9971,12 +9971,12 @@
         </p:nvSpPr>
         <p:spPr>
           <a:xfrm>
-            <a:off x="548640" y="2289048"/>
-            <a:ext cx="11064240" cy="762000"/>
+            <a:off x="548640" y="2209800"/>
+            <a:ext cx="11064240" cy="682752"/>
           </a:xfrm>
           <a:prstGeom prst="roundRect">
             <a:avLst>
-              <a:gd name="adj" fmla="val 14400"/>
+              <a:gd name="adj" fmla="val 16071"/>
             </a:avLst>
           </a:prstGeom>
           <a:solidFill>
@@ -10002,8 +10002,8 @@
         </p:nvSpPr>
         <p:spPr>
           <a:xfrm>
-            <a:off x="731520" y="2289048"/>
-            <a:ext cx="548640" cy="762000"/>
+            <a:off x="731520" y="2209800"/>
+            <a:ext cx="548640" cy="682752"/>
           </a:xfrm>
           <a:prstGeom prst="rect">
             <a:avLst/>
@@ -10038,8 +10038,8 @@
         </p:nvSpPr>
         <p:spPr>
           <a:xfrm>
-            <a:off x="1463040" y="2289048"/>
-            <a:ext cx="9966960" cy="762000"/>
+            <a:off x="1463040" y="2209800"/>
+            <a:ext cx="9966960" cy="682752"/>
           </a:xfrm>
           <a:prstGeom prst="rect">
             <a:avLst/>
@@ -10074,12 +10074,12 @@
         </p:nvSpPr>
         <p:spPr>
           <a:xfrm>
-            <a:off x="548640" y="3160776"/>
-            <a:ext cx="11064240" cy="762000"/>
+            <a:off x="548640" y="3002280"/>
+            <a:ext cx="11064240" cy="682752"/>
           </a:xfrm>
           <a:prstGeom prst="roundRect">
             <a:avLst>
-              <a:gd name="adj" fmla="val 14400"/>
+              <a:gd name="adj" fmla="val 16071"/>
             </a:avLst>
           </a:prstGeom>
           <a:solidFill>
@@ -10105,8 +10105,8 @@
         </p:nvSpPr>
         <p:spPr>
           <a:xfrm>
-            <a:off x="731520" y="3160776"/>
-            <a:ext cx="548640" cy="762000"/>
+            <a:off x="731520" y="3002280"/>
+            <a:ext cx="548640" cy="682752"/>
           </a:xfrm>
           <a:prstGeom prst="rect">
             <a:avLst/>
@@ -10141,8 +10141,8 @@
         </p:nvSpPr>
         <p:spPr>
           <a:xfrm>
-            <a:off x="1463040" y="3160776"/>
-            <a:ext cx="9966960" cy="762000"/>
+            <a:off x="1463040" y="3002280"/>
+            <a:ext cx="9966960" cy="682752"/>
           </a:xfrm>
           <a:prstGeom prst="rect">
             <a:avLst/>
@@ -10177,12 +10177,12 @@
         </p:nvSpPr>
         <p:spPr>
           <a:xfrm>
-            <a:off x="548640" y="4032504"/>
-            <a:ext cx="11064240" cy="762000"/>
+            <a:off x="548640" y="3794760"/>
+            <a:ext cx="11064240" cy="682752"/>
           </a:xfrm>
           <a:prstGeom prst="roundRect">
             <a:avLst>
-              <a:gd name="adj" fmla="val 14400"/>
+              <a:gd name="adj" fmla="val 16071"/>
             </a:avLst>
           </a:prstGeom>
           <a:solidFill>
@@ -10208,8 +10208,8 @@
         </p:nvSpPr>
         <p:spPr>
           <a:xfrm>
-            <a:off x="731520" y="4032504"/>
-            <a:ext cx="548640" cy="762000"/>
+            <a:off x="731520" y="3794760"/>
+            <a:ext cx="548640" cy="682752"/>
           </a:xfrm>
           <a:prstGeom prst="rect">
             <a:avLst/>
@@ -10244,8 +10244,8 @@
         </p:nvSpPr>
         <p:spPr>
           <a:xfrm>
-            <a:off x="1463040" y="4032504"/>
-            <a:ext cx="9966960" cy="762000"/>
+            <a:off x="1463040" y="3794760"/>
+            <a:ext cx="9966960" cy="682752"/>
           </a:xfrm>
           <a:prstGeom prst="rect">
             <a:avLst/>
@@ -10280,12 +10280,12 @@
         </p:nvSpPr>
         <p:spPr>
           <a:xfrm>
-            <a:off x="548640" y="4904232"/>
-            <a:ext cx="11064240" cy="762000"/>
+            <a:off x="548640" y="4587240"/>
+            <a:ext cx="11064240" cy="682752"/>
           </a:xfrm>
           <a:prstGeom prst="roundRect">
             <a:avLst>
-              <a:gd name="adj" fmla="val 14400"/>
+              <a:gd name="adj" fmla="val 16071"/>
             </a:avLst>
           </a:prstGeom>
           <a:solidFill>
@@ -10311,8 +10311,8 @@
         </p:nvSpPr>
         <p:spPr>
           <a:xfrm>
-            <a:off x="731520" y="4904232"/>
-            <a:ext cx="548640" cy="762000"/>
+            <a:off x="731520" y="4587240"/>
+            <a:ext cx="548640" cy="682752"/>
           </a:xfrm>
           <a:prstGeom prst="rect">
             <a:avLst/>
@@ -10347,8 +10347,8 @@
         </p:nvSpPr>
         <p:spPr>
           <a:xfrm>
-            <a:off x="1463040" y="4904232"/>
-            <a:ext cx="9966960" cy="762000"/>
+            <a:off x="1463040" y="4587240"/>
+            <a:ext cx="9966960" cy="682752"/>
           </a:xfrm>
           <a:prstGeom prst="rect">
             <a:avLst/>
@@ -10383,12 +10383,12 @@
         </p:nvSpPr>
         <p:spPr>
           <a:xfrm>
-            <a:off x="548640" y="5775960"/>
-            <a:ext cx="11064240" cy="762000"/>
+            <a:off x="548640" y="5379720"/>
+            <a:ext cx="11064240" cy="682752"/>
           </a:xfrm>
           <a:prstGeom prst="roundRect">
             <a:avLst>
-              <a:gd name="adj" fmla="val 14400"/>
+              <a:gd name="adj" fmla="val 16071"/>
             </a:avLst>
           </a:prstGeom>
           <a:solidFill>
@@ -10414,8 +10414,8 @@
         </p:nvSpPr>
         <p:spPr>
           <a:xfrm>
-            <a:off x="731520" y="5775960"/>
-            <a:ext cx="548640" cy="762000"/>
+            <a:off x="731520" y="5379720"/>
+            <a:ext cx="548640" cy="682752"/>
           </a:xfrm>
           <a:prstGeom prst="rect">
             <a:avLst/>
@@ -10450,8 +10450,8 @@
         </p:nvSpPr>
         <p:spPr>
           <a:xfrm>
-            <a:off x="1463040" y="5775960"/>
-            <a:ext cx="9966960" cy="762000"/>
+            <a:off x="1463040" y="5379720"/>
+            <a:ext cx="9966960" cy="682752"/>
           </a:xfrm>
           <a:prstGeom prst="rect">
             <a:avLst/>
